--- a/carpentry/intake-142/PowerPoint/Day-11_2026-11-17_Week-4.pptx
+++ b/carpentry/intake-142/PowerPoint/Day-11_2026-11-17_Week-4.pptx
@@ -706,7 +706,7 @@
           <a:p/>
           <a:p>
             <a:r>
-              <a:t>Open the textbook to sections 5.1–5.5, pages 76–81, and have exercise book 5A and 5B ready. When you read 30.249 millimetres, each digit tells us a different-sized part of a millimetre. The number is useful because we know the unit. Where have you seen a decimal measurement on a drawing or tool? Listen for millimetres, metres or decimal inches. Today you will explain the size before relying on the calculator display.</a:t>
+              <a:t>Open the textbook to sections 5.1–5.5, pages 114–119, and have exercise book 5A and 5B ready. When you read 30.249 millimetres, each digit tells us a different-sized part of a millimetre. The number is useful because we know the unit. Where have you seen a decimal measurement on a drawing or tool? Listen for millimetres, metres or decimal inches. Today you will explain the size before relying on the calculator display.</a:t>
             </a:r>
           </a:p>
         </p:txBody>
@@ -1092,7 +1092,7 @@
           <a:p/>
           <a:p>
             <a:r>
-              <a:t>On textbook page 79, Example 5.5 totals four cut lengths: 152.4, 76.2, 38.1 and 12.7 millimetres. The tenths add to fourteen tenths. That is one whole millimetre and four tenths, so we carry one into the whole-number column. The whole numbers total 278, and the carried one makes 279.4 millimetres. What would happen if we lined up the last digits instead of the points when the decimal places differ? We could add unlike places. The method must align values, not just the appearance of the written numbers.</a:t>
+              <a:t>On textbook page 117, Example 5.5 totals four cut lengths: 152.4, 76.2, 38.1 and 12.7 millimetres. The tenths add to fourteen tenths. That is one whole millimetre and four tenths, so we carry one into the whole-number column. The whole numbers total 278, and the carried one makes 279.4 millimetres. What would happen if we lined up the last digits instead of the points when the decimal places differ? We could add unlike places. The method must align values, not just the appearance of the written numbers.</a:t>
             </a:r>
           </a:p>
         </p:txBody>
@@ -2338,7 +2338,7 @@
           <a:p/>
           <a:p>
             <a:r>
-              <a:t>Now the question changes from “What is the decimal?” to “How will I use this answer?” A drawing may show decimal inches, your tape may show sixteenths, and an invoice uses cents. We will move between those forms without losing precision too soon. Open textbook sections 5.6–5.7, pages 82–87. What tells us how to round? The question and the intended measurement or money unit. The calculator display alone cannot make that decision for us.</a:t>
+              <a:t>Now the question changes from “What is the decimal?” to “How will I use this answer?” A drawing may show decimal inches, your tape may show sixteenths, and an invoice uses cents. We will move between those forms without losing precision too soon. Open textbook sections 5.6–5.7, pages 120–132. What tells us how to round? The question and the intended measurement or money unit. The calculator display alone cannot make that decision for us.</a:t>
             </a:r>
           </a:p>
         </p:txBody>
@@ -2642,7 +2642,7 @@
           <a:p/>
           <a:p>
             <a:r>
-              <a:t>Look at the textbook’s graduated rule on page 84. It shows 2.83 inches between 2 26/32 and 2 27/32. Do not judge it from the size of the projected picture; use the written values and marked graduations. The fractional part is 0.83, and 0.83 times 32 is 26.56. That is a little past halfway between counts twenty-six and twenty-seven, so it lies closer to twenty-seven. Which whole-inch number stays unchanged? The two. We are locating the remaining fraction within that inch.</a:t>
+              <a:t>Look at the textbook’s graduated rule on page 122. It shows 2.83 inches between 2 26/32 and 2 27/32. Do not judge it from the size of the projected picture; use the written values and marked graduations. The fractional part is 0.83, and 0.83 times 32 is 26.56. That is a little past halfway between counts twenty-six and twenty-seven, so it lies closer to twenty-seven. Which whole-inch number stays unchanged? The two. We are locating the remaining fraction within that inch.</a:t>
             </a:r>
           </a:p>
         </p:txBody>
@@ -5480,7 +5480,7 @@
                 </a:solidFill>
                 <a:latin typeface="Arial"/>
               </a:rPr>
-              <a:t>Textbook  |  page 79</a:t>
+              <a:t>Textbook  |  page 117</a:t>
             </a:r>
           </a:p>
         </p:txBody>
@@ -5528,7 +5528,7 @@
                 </a:solidFill>
                 <a:latin typeface="Arial"/>
               </a:rPr>
-              <a:t>Textbook sections 5.1–5.5 pp.76–81</a:t>
+              <a:t>Textbook sections 5.1–5.5 pp.114–119</a:t>
             </a:r>
           </a:p>
         </p:txBody>
@@ -5600,7 +5600,7 @@
                 </a:solidFill>
                 <a:latin typeface="Arial"/>
               </a:rPr>
-              <a:t>Textbook p.79 • Example 5.6 — Hidden length on a stepped pin</a:t>
+              <a:t>Textbook p.117 • Example 5.6 — Hidden length on a stepped pin</a:t>
             </a:r>
           </a:p>
         </p:txBody>
@@ -6214,7 +6214,7 @@
                 </a:solidFill>
                 <a:latin typeface="Arial"/>
               </a:rPr>
-              <a:t>Textbook sections 5.1–5.5 pp.76–81</a:t>
+              <a:t>Textbook sections 5.1–5.5 pp.114–119</a:t>
             </a:r>
           </a:p>
         </p:txBody>
@@ -6972,7 +6972,7 @@
                 </a:solidFill>
                 <a:latin typeface="Arial"/>
               </a:rPr>
-              <a:t>Textbook sections 5.1–5.5 pp.76–81</a:t>
+              <a:t>Textbook sections 5.1–5.5 pp.114–119</a:t>
             </a:r>
           </a:p>
         </p:txBody>
@@ -7172,7 +7172,7 @@
                 </a:solidFill>
                 <a:latin typeface="Arial"/>
               </a:rPr>
-              <a:t>Resources: Exercise Book 5A Q1–11 (pp.32–33); 5B Q1,3 (p.34)</a:t>
+              <a:t>Resources: Exercise Book 5A Q1–11 (pp.45–46); 5B Q1,3 (p.47)</a:t>
             </a:r>
           </a:p>
         </p:txBody>
@@ -7786,7 +7786,7 @@
                 </a:solidFill>
                 <a:latin typeface="Arial"/>
               </a:rPr>
-              <a:t>Textbook sections 5.1–5.5 pp.76–81</a:t>
+              <a:t>Textbook sections 5.1–5.5 pp.114–119</a:t>
             </a:r>
           </a:p>
         </p:txBody>
@@ -8542,7 +8542,7 @@
                 </a:solidFill>
                 <a:latin typeface="Arial"/>
               </a:rPr>
-              <a:t>Textbook sections 5.1–5.5 pp.76–81</a:t>
+              <a:t>Textbook sections 5.1–5.5 pp.114–119</a:t>
             </a:r>
           </a:p>
         </p:txBody>
@@ -9276,7 +9276,7 @@
                 </a:solidFill>
                 <a:latin typeface="Arial"/>
               </a:rPr>
-              <a:t>Textbook sections 5.1–5.5 pp.76–81</a:t>
+              <a:t>Textbook sections 5.1–5.5 pp.114–119</a:t>
             </a:r>
           </a:p>
         </p:txBody>
@@ -9476,7 +9476,7 @@
                 </a:solidFill>
                 <a:latin typeface="Arial"/>
               </a:rPr>
-              <a:t>Resources: Exercise Book 5A Q1–11 (pp.32–33); 5B Q1,3 (p.34)</a:t>
+              <a:t>Resources: Exercise Book 5A Q1–11 (pp.45–46); 5B Q1,3 (p.47)</a:t>
             </a:r>
           </a:p>
         </p:txBody>
@@ -10090,7 +10090,7 @@
                 </a:solidFill>
                 <a:latin typeface="Arial"/>
               </a:rPr>
-              <a:t>Textbook sections 5.1–5.5 pp.76–81</a:t>
+              <a:t>Textbook sections 5.1–5.5 pp.114–119</a:t>
             </a:r>
           </a:p>
         </p:txBody>
@@ -10866,7 +10866,7 @@
                 </a:solidFill>
                 <a:latin typeface="Arial"/>
               </a:rPr>
-              <a:t>Textbook sections 5.1–5.5 pp.76–81</a:t>
+              <a:t>Textbook sections 5.1–5.5 pp.114–119</a:t>
             </a:r>
           </a:p>
         </p:txBody>
@@ -11825,7 +11825,7 @@
                 </a:solidFill>
                 <a:latin typeface="Arial"/>
               </a:rPr>
-              <a:t>Textbook sections 5.1–5.5 pp.76–81</a:t>
+              <a:t>Textbook sections 5.1–5.5 pp.114–119</a:t>
             </a:r>
           </a:p>
         </p:txBody>
@@ -12536,7 +12536,7 @@
                 </a:solidFill>
                 <a:latin typeface="Arial"/>
               </a:rPr>
-              <a:t>Textbook sections 5.1–5.5 pp.76–81</a:t>
+              <a:t>Textbook sections 5.1–5.5 pp.114–119</a:t>
             </a:r>
           </a:p>
         </p:txBody>
@@ -16574,7 +16574,7 @@
                 </a:solidFill>
                 <a:latin typeface="Arial"/>
               </a:rPr>
-              <a:t>Textbook sections 5.1–5.5 pp.76–81</a:t>
+              <a:t>Textbook sections 5.1–5.5 pp.114–119</a:t>
             </a:r>
           </a:p>
         </p:txBody>
@@ -16774,7 +16774,7 @@
                 </a:solidFill>
                 <a:latin typeface="Arial"/>
               </a:rPr>
-              <a:t>Resources: Exercise Book 5A Q1–11 (pp.32–33); 5B Q1,3 (p.34)</a:t>
+              <a:t>Resources: Exercise Book 5A Q1–11 (pp.45–46); 5B Q1,3 (p.47)</a:t>
             </a:r>
           </a:p>
         </p:txBody>
@@ -17388,7 +17388,7 @@
                 </a:solidFill>
                 <a:latin typeface="Arial"/>
               </a:rPr>
-              <a:t>Textbook sections 5.1–5.5 pp.76–81</a:t>
+              <a:t>Textbook sections 5.1–5.5 pp.114–119</a:t>
             </a:r>
           </a:p>
         </p:txBody>
@@ -18074,7 +18074,7 @@
                 </a:solidFill>
                 <a:latin typeface="Arial"/>
               </a:rPr>
-              <a:t>Textbook sections 5.1–5.5 pp.76–81</a:t>
+              <a:t>Textbook sections 5.1–5.5 pp.114–119</a:t>
             </a:r>
           </a:p>
         </p:txBody>
@@ -18760,7 +18760,7 @@
                 </a:solidFill>
                 <a:latin typeface="Arial"/>
               </a:rPr>
-              <a:t>Textbook sections 5.1–5.5 pp.76–81</a:t>
+              <a:t>Textbook sections 5.1–5.5 pp.114–119</a:t>
             </a:r>
           </a:p>
         </p:txBody>
@@ -18960,7 +18960,7 @@
                 </a:solidFill>
                 <a:latin typeface="Arial"/>
               </a:rPr>
-              <a:t>Resources: Exercise Book 5A Q1–11 (pp.32–33); 5B Q1,3 (p.34)</a:t>
+              <a:t>Resources: Exercise Book 5A Q1–11 (pp.45–46); 5B Q1,3 (p.47)</a:t>
             </a:r>
           </a:p>
         </p:txBody>
@@ -20239,7 +20239,7 @@
                 </a:solidFill>
                 <a:latin typeface="Arial"/>
               </a:rPr>
-              <a:t>Textbook sections 5.6–5.7 pp.82–87</a:t>
+              <a:t>Textbook sections 5.6–5.7 pp.120–132</a:t>
             </a:r>
           </a:p>
         </p:txBody>
@@ -20439,7 +20439,7 @@
                 </a:solidFill>
                 <a:latin typeface="Arial"/>
               </a:rPr>
-              <a:t>Textbook sections 5.6–5.7 pp.82–87</a:t>
+              <a:t>Textbook sections 5.6–5.7 pp.120–132</a:t>
             </a:r>
           </a:p>
         </p:txBody>
@@ -20487,7 +20487,7 @@
                 </a:solidFill>
                 <a:latin typeface="Arial"/>
               </a:rPr>
-              <a:t>Exercise Book 5A Q12–15 (p.33); 5B Q2,4,7 (p.34)</a:t>
+              <a:t>Exercise Book 5A Q12–15 (p.46); 5B Q2,4,7 (pp.47–48)</a:t>
             </a:r>
           </a:p>
         </p:txBody>
@@ -21149,7 +21149,7 @@
                 </a:solidFill>
                 <a:latin typeface="Arial"/>
               </a:rPr>
-              <a:t>Textbook sections 5.6–5.7 pp.82–87</a:t>
+              <a:t>Textbook sections 5.6–5.7 pp.120–132</a:t>
             </a:r>
           </a:p>
         </p:txBody>
@@ -21349,7 +21349,7 @@
                 </a:solidFill>
                 <a:latin typeface="Arial"/>
               </a:rPr>
-              <a:t>Resources: Exercise Book 5A Q12–15 (p.33); 5B Q2,4,7 (p.34)</a:t>
+              <a:t>Resources: Exercise Book 5A Q12–15 (p.46); 5B Q2,4,7 (pp.47–48)</a:t>
             </a:r>
           </a:p>
         </p:txBody>
@@ -22098,7 +22098,7 @@
                 </a:solidFill>
                 <a:latin typeface="Arial"/>
               </a:rPr>
-              <a:t>Textbook sections 5.6–5.7 pp.82–87</a:t>
+              <a:t>Textbook sections 5.6–5.7 pp.120–132</a:t>
             </a:r>
           </a:p>
         </p:txBody>
@@ -23343,7 +23343,7 @@
                 </a:solidFill>
                 <a:latin typeface="Arial"/>
               </a:rPr>
-              <a:t>Textbook sections 5.6–5.7 pp.82–87</a:t>
+              <a:t>Textbook sections 5.6–5.7 pp.120–132</a:t>
             </a:r>
           </a:p>
         </p:txBody>
@@ -25181,7 +25181,7 @@
                 </a:solidFill>
                 <a:latin typeface="Arial"/>
               </a:rPr>
-              <a:t>Textbook sections 5.1–5.5 pp.76–81</a:t>
+              <a:t>Textbook sections 5.1–5.5 pp.114–119</a:t>
             </a:r>
           </a:p>
         </p:txBody>
@@ -25381,7 +25381,7 @@
                 </a:solidFill>
                 <a:latin typeface="Arial"/>
               </a:rPr>
-              <a:t>Textbook sections 5.1–5.5 pp.76–81</a:t>
+              <a:t>Textbook sections 5.1–5.5 pp.114–119</a:t>
             </a:r>
           </a:p>
         </p:txBody>
@@ -25429,7 +25429,7 @@
                 </a:solidFill>
                 <a:latin typeface="Arial"/>
               </a:rPr>
-              <a:t>Exercise Book 5A Q1–11 (pp.32–33); 5B Q1,3 (p.34)</a:t>
+              <a:t>Exercise Book 5A Q1–11 (pp.45–46); 5B Q1,3 (p.47)</a:t>
             </a:r>
           </a:p>
         </p:txBody>
@@ -26043,7 +26043,7 @@
                 </a:solidFill>
                 <a:latin typeface="Arial"/>
               </a:rPr>
-              <a:t>Textbook  |  page 84</a:t>
+              <a:t>Textbook  |  page 122</a:t>
             </a:r>
           </a:p>
         </p:txBody>
@@ -26091,7 +26091,7 @@
                 </a:solidFill>
                 <a:latin typeface="Arial"/>
               </a:rPr>
-              <a:t>Textbook sections 5.6–5.7 pp.82–87</a:t>
+              <a:t>Textbook sections 5.6–5.7 pp.120–132</a:t>
             </a:r>
           </a:p>
         </p:txBody>
@@ -26163,7 +26163,7 @@
                 </a:solidFill>
                 <a:latin typeface="Arial"/>
               </a:rPr>
-              <a:t>Textbook p.84 • Figure 5.4 — Locating a decimal inch on a graduated rule</a:t>
+              <a:t>Textbook p.122 • Figure 5.4 — Locating a decimal inch on a graduated rule</a:t>
             </a:r>
           </a:p>
         </p:txBody>
@@ -26729,7 +26729,7 @@
                 </a:solidFill>
                 <a:latin typeface="Arial"/>
               </a:rPr>
-              <a:t>Textbook  |  page 84</a:t>
+              <a:t>Textbook  |  page 122</a:t>
             </a:r>
           </a:p>
         </p:txBody>
@@ -26777,7 +26777,7 @@
                 </a:solidFill>
                 <a:latin typeface="Arial"/>
               </a:rPr>
-              <a:t>Textbook sections 5.6–5.7 pp.82–87</a:t>
+              <a:t>Textbook sections 5.6–5.7 pp.120–132</a:t>
             </a:r>
           </a:p>
         </p:txBody>
@@ -26849,7 +26849,7 @@
                 </a:solidFill>
                 <a:latin typeface="Arial"/>
               </a:rPr>
-              <a:t>Textbook p.84 • Example 5.11 — Rounding to sixteenths and thirty-seconds</a:t>
+              <a:t>Textbook p.122 • Example 5.11 — Rounding to sixteenths and thirty-seconds</a:t>
             </a:r>
           </a:p>
         </p:txBody>
@@ -27463,7 +27463,7 @@
                 </a:solidFill>
                 <a:latin typeface="Arial"/>
               </a:rPr>
-              <a:t>Textbook sections 5.6–5.7 pp.82–87</a:t>
+              <a:t>Textbook sections 5.6–5.7 pp.120–132</a:t>
             </a:r>
           </a:p>
         </p:txBody>
@@ -28221,7 +28221,7 @@
                 </a:solidFill>
                 <a:latin typeface="Arial"/>
               </a:rPr>
-              <a:t>Textbook sections 5.6–5.7 pp.82–87</a:t>
+              <a:t>Textbook sections 5.6–5.7 pp.120–132</a:t>
             </a:r>
           </a:p>
         </p:txBody>
@@ -28421,7 +28421,7 @@
                 </a:solidFill>
                 <a:latin typeface="Arial"/>
               </a:rPr>
-              <a:t>Resources: Exercise Book 5A Q12–15 (p.33); 5B Q2,4,7 (p.34)</a:t>
+              <a:t>Resources: Exercise Book 5A Q12–15 (p.46); 5B Q2,4,7 (pp.47–48)</a:t>
             </a:r>
           </a:p>
         </p:txBody>
@@ -29035,7 +29035,7 @@
                 </a:solidFill>
                 <a:latin typeface="Arial"/>
               </a:rPr>
-              <a:t>Textbook sections 5.6–5.7 pp.82–87</a:t>
+              <a:t>Textbook sections 5.6–5.7 pp.120–132</a:t>
             </a:r>
           </a:p>
         </p:txBody>
@@ -29791,7 +29791,7 @@
                 </a:solidFill>
                 <a:latin typeface="Arial"/>
               </a:rPr>
-              <a:t>Textbook sections 5.6–5.7 pp.82–87</a:t>
+              <a:t>Textbook sections 5.6–5.7 pp.120–132</a:t>
             </a:r>
           </a:p>
         </p:txBody>
@@ -30525,7 +30525,7 @@
                 </a:solidFill>
                 <a:latin typeface="Arial"/>
               </a:rPr>
-              <a:t>Textbook sections 5.6–5.7 pp.82–87</a:t>
+              <a:t>Textbook sections 5.6–5.7 pp.120–132</a:t>
             </a:r>
           </a:p>
         </p:txBody>
@@ -30725,7 +30725,7 @@
                 </a:solidFill>
                 <a:latin typeface="Arial"/>
               </a:rPr>
-              <a:t>Resources: Exercise Book 5A Q12–15 (p.33); 5B Q2,4,7 (p.34)</a:t>
+              <a:t>Resources: Exercise Book 5A Q12–15 (p.46); 5B Q2,4,7 (pp.47–48)</a:t>
             </a:r>
           </a:p>
         </p:txBody>
@@ -31339,7 +31339,7 @@
                 </a:solidFill>
                 <a:latin typeface="Arial"/>
               </a:rPr>
-              <a:t>Textbook sections 5.6–5.7 pp.82–87</a:t>
+              <a:t>Textbook sections 5.6–5.7 pp.120–132</a:t>
             </a:r>
           </a:p>
         </p:txBody>
@@ -32115,7 +32115,7 @@
                 </a:solidFill>
                 <a:latin typeface="Arial"/>
               </a:rPr>
-              <a:t>Textbook sections 5.6–5.7 pp.82–87</a:t>
+              <a:t>Textbook sections 5.6–5.7 pp.120–132</a:t>
             </a:r>
           </a:p>
         </p:txBody>
@@ -33074,7 +33074,7 @@
                 </a:solidFill>
                 <a:latin typeface="Arial"/>
               </a:rPr>
-              <a:t>Textbook sections 5.6–5.7 pp.82–87</a:t>
+              <a:t>Textbook sections 5.6–5.7 pp.120–132</a:t>
             </a:r>
           </a:p>
         </p:txBody>
@@ -33760,7 +33760,7 @@
                 </a:solidFill>
                 <a:latin typeface="Arial"/>
               </a:rPr>
-              <a:t>Textbook sections 5.1–5.5 pp.76–81</a:t>
+              <a:t>Textbook sections 5.1–5.5 pp.114–119</a:t>
             </a:r>
           </a:p>
         </p:txBody>
@@ -33960,7 +33960,7 @@
                 </a:solidFill>
                 <a:latin typeface="Arial"/>
               </a:rPr>
-              <a:t>Resources: Exercise Book 5A Q1–11 (pp.32–33); 5B Q1,3 (p.34)</a:t>
+              <a:t>Resources: Exercise Book 5A Q1–11 (pp.45–46); 5B Q1,3 (p.47)</a:t>
             </a:r>
           </a:p>
         </p:txBody>
@@ -34574,7 +34574,7 @@
                 </a:solidFill>
                 <a:latin typeface="Arial"/>
               </a:rPr>
-              <a:t>Textbook sections 5.6–5.7 pp.82–87</a:t>
+              <a:t>Textbook sections 5.6–5.7 pp.120–132</a:t>
             </a:r>
           </a:p>
         </p:txBody>
@@ -35285,7 +35285,7 @@
                 </a:solidFill>
                 <a:latin typeface="Arial"/>
               </a:rPr>
-              <a:t>Textbook sections 5.6–5.7 pp.82–87</a:t>
+              <a:t>Textbook sections 5.6–5.7 pp.120–132</a:t>
             </a:r>
           </a:p>
         </p:txBody>
@@ -35485,7 +35485,7 @@
                 </a:solidFill>
                 <a:latin typeface="Arial"/>
               </a:rPr>
-              <a:t>Resources: Exercise Book 5A Q12–15 (p.33); 5B Q2,4,7 (p.34)</a:t>
+              <a:t>Resources: Exercise Book 5A Q12–15 (p.46); 5B Q2,4,7 (pp.47–48)</a:t>
             </a:r>
           </a:p>
         </p:txBody>
@@ -36099,7 +36099,7 @@
                 </a:solidFill>
                 <a:latin typeface="Arial"/>
               </a:rPr>
-              <a:t>Textbook sections 5.6–5.7 pp.82–87</a:t>
+              <a:t>Textbook sections 5.6–5.7 pp.120–132</a:t>
             </a:r>
           </a:p>
         </p:txBody>
@@ -36785,7 +36785,7 @@
                 </a:solidFill>
                 <a:latin typeface="Arial"/>
               </a:rPr>
-              <a:t>Textbook sections 5.6–5.7 pp.82–87</a:t>
+              <a:t>Textbook sections 5.6–5.7 pp.120–132</a:t>
             </a:r>
           </a:p>
         </p:txBody>
@@ -37471,7 +37471,7 @@
                 </a:solidFill>
                 <a:latin typeface="Arial"/>
               </a:rPr>
-              <a:t>Textbook sections 5.6–5.7 pp.82–87</a:t>
+              <a:t>Textbook sections 5.6–5.7 pp.120–132</a:t>
             </a:r>
           </a:p>
         </p:txBody>
@@ -37671,7 +37671,7 @@
                 </a:solidFill>
                 <a:latin typeface="Arial"/>
               </a:rPr>
-              <a:t>Resources: Exercise Book 5A Q12–15 (p.33); 5B Q2,4,7 (p.34)</a:t>
+              <a:t>Resources: Exercise Book 5A Q12–15 (p.46); 5B Q2,4,7 (pp.47–48)</a:t>
             </a:r>
           </a:p>
         </p:txBody>
@@ -38285,7 +38285,7 @@
                 </a:solidFill>
                 <a:latin typeface="Arial"/>
               </a:rPr>
-              <a:t>Textbook sections 5.1–5.5 pp.76–81</a:t>
+              <a:t>Textbook sections 5.1–5.5 pp.114–119</a:t>
             </a:r>
           </a:p>
         </p:txBody>
@@ -39131,7 +39131,7 @@
                 </a:solidFill>
                 <a:latin typeface="Arial"/>
               </a:rPr>
-              <a:t>Textbook sections 5.1–5.5 pp.76–81</a:t>
+              <a:t>Textbook sections 5.1–5.5 pp.114–119</a:t>
             </a:r>
           </a:p>
         </p:txBody>
@@ -40376,7 +40376,7 @@
                 </a:solidFill>
                 <a:latin typeface="Arial"/>
               </a:rPr>
-              <a:t>Textbook sections 5.1–5.5 pp.76–81</a:t>
+              <a:t>Textbook sections 5.1–5.5 pp.114–119</a:t>
             </a:r>
           </a:p>
         </p:txBody>
@@ -42235,7 +42235,7 @@
                 </a:solidFill>
                 <a:latin typeface="Arial"/>
               </a:rPr>
-              <a:t>Textbook  |  page 79</a:t>
+              <a:t>Textbook  |  page 117</a:t>
             </a:r>
           </a:p>
         </p:txBody>
@@ -42283,7 +42283,7 @@
                 </a:solidFill>
                 <a:latin typeface="Arial"/>
               </a:rPr>
-              <a:t>Textbook sections 5.1–5.5 pp.76–81</a:t>
+              <a:t>Textbook sections 5.1–5.5 pp.114–119</a:t>
             </a:r>
           </a:p>
         </p:txBody>
@@ -42355,7 +42355,7 @@
                 </a:solidFill>
                 <a:latin typeface="Arial"/>
               </a:rPr>
-              <a:t>Textbook p.79 • Example 5.5 — Aligning decimal cut-list lengths</a:t>
+              <a:t>Textbook p.117 • Example 5.5 — Aligning decimal cut-list lengths</a:t>
             </a:r>
           </a:p>
         </p:txBody>

--- a/carpentry/intake-142/PowerPoint/Day-11_2026-11-17_Week-4.pptx
+++ b/carpentry/intake-142/PowerPoint/Day-11_2026-11-17_Week-4.pptx
@@ -19233,6 +19233,104 @@
           </a:p>
         </p:txBody>
       </p:sp>
+      <p:sp>
+        <p:nvSpPr>
+          <p:cNvPr id="22" name="Play quiz W04-L03"/>
+          <p:cNvSpPr txBox="1"/>
+          <p:nvPr/>
+        </p:nvSpPr>
+        <p:spPr>
+          <a:xfrm>
+            <a:off x="6355080" y="6606540"/>
+            <a:ext cx="822960" cy="210312"/>
+          </a:xfrm>
+          <a:prstGeom prst="rect">
+            <a:avLst/>
+          </a:prstGeom>
+          <a:noFill/>
+        </p:spPr>
+        <p:txBody>
+          <a:bodyPr wrap="square" lIns="0" rIns="0" tIns="0" bIns="0" anchor="t">
+            <a:normAutofit fontScale="100000" lnSpcReduction="0"/>
+          </a:bodyPr>
+          <a:lstStyle/>
+          <a:p>
+            <a:pPr>
+              <a:spcBef>
+                <a:spcPts val="0"/>
+              </a:spcBef>
+              <a:spcAft>
+                <a:spcPts val="0"/>
+              </a:spcAft>
+              <a:defRPr sz="1000" b="0">
+                <a:solidFill>
+                  <a:srgbClr val="D0002B"/>
+                </a:solidFill>
+                <a:latin typeface="Arial"/>
+              </a:defRPr>
+            </a:pPr>
+            <a:r>
+              <a:rPr sz="1000">
+                <a:solidFill>
+                  <a:srgbClr val="F7F8FC"/>
+                </a:solidFill>
+                <a:latin typeface="Arial"/>
+                <a:hlinkClick r:id="rId8"/>
+              </a:rPr>
+              <a:t>Play quiz</a:t>
+            </a:r>
+          </a:p>
+        </p:txBody>
+      </p:sp>
+      <p:sp>
+        <p:nvSpPr>
+          <p:cNvPr id="23" name="Quiz PDF W04-L03"/>
+          <p:cNvSpPr txBox="1"/>
+          <p:nvPr/>
+        </p:nvSpPr>
+        <p:spPr>
+          <a:xfrm>
+            <a:off x="7296912" y="6606540"/>
+            <a:ext cx="1005840" cy="210312"/>
+          </a:xfrm>
+          <a:prstGeom prst="rect">
+            <a:avLst/>
+          </a:prstGeom>
+          <a:noFill/>
+        </p:spPr>
+        <p:txBody>
+          <a:bodyPr wrap="square" lIns="0" rIns="0" tIns="0" bIns="0" anchor="t">
+            <a:normAutofit fontScale="100000" lnSpcReduction="0"/>
+          </a:bodyPr>
+          <a:lstStyle/>
+          <a:p>
+            <a:pPr>
+              <a:spcBef>
+                <a:spcPts val="0"/>
+              </a:spcBef>
+              <a:spcAft>
+                <a:spcPts val="0"/>
+              </a:spcAft>
+              <a:defRPr sz="1000" b="0">
+                <a:solidFill>
+                  <a:srgbClr val="D0002B"/>
+                </a:solidFill>
+                <a:latin typeface="Arial"/>
+              </a:defRPr>
+            </a:pPr>
+            <a:r>
+              <a:rPr sz="1000">
+                <a:solidFill>
+                  <a:srgbClr val="F7F8FC"/>
+                </a:solidFill>
+                <a:latin typeface="Arial"/>
+                <a:hlinkClick r:id="rId9"/>
+              </a:rPr>
+              <a:t>Quiz PDF</a:t>
+            </a:r>
+          </a:p>
+        </p:txBody>
+      </p:sp>
     </p:spTree>
   </p:cSld>
   <p:clrMapOvr>
@@ -37940,6 +38038,104 @@
                 <a:latin typeface="Arial"/>
               </a:rPr>
               <a:t>Day 11  •  2026-11-17  •  44</a:t>
+            </a:r>
+          </a:p>
+        </p:txBody>
+      </p:sp>
+      <p:sp>
+        <p:nvSpPr>
+          <p:cNvPr id="22" name="Play quiz W04-L04"/>
+          <p:cNvSpPr txBox="1"/>
+          <p:nvPr/>
+        </p:nvSpPr>
+        <p:spPr>
+          <a:xfrm>
+            <a:off x="6355080" y="6606540"/>
+            <a:ext cx="822960" cy="210312"/>
+          </a:xfrm>
+          <a:prstGeom prst="rect">
+            <a:avLst/>
+          </a:prstGeom>
+          <a:noFill/>
+        </p:spPr>
+        <p:txBody>
+          <a:bodyPr wrap="square" lIns="0" rIns="0" tIns="0" bIns="0" anchor="t">
+            <a:normAutofit fontScale="100000" lnSpcReduction="0"/>
+          </a:bodyPr>
+          <a:lstStyle/>
+          <a:p>
+            <a:pPr>
+              <a:spcBef>
+                <a:spcPts val="0"/>
+              </a:spcBef>
+              <a:spcAft>
+                <a:spcPts val="0"/>
+              </a:spcAft>
+              <a:defRPr sz="1000" b="0">
+                <a:solidFill>
+                  <a:srgbClr val="D0002B"/>
+                </a:solidFill>
+                <a:latin typeface="Arial"/>
+              </a:defRPr>
+            </a:pPr>
+            <a:r>
+              <a:rPr sz="1000">
+                <a:solidFill>
+                  <a:srgbClr val="F7F8FC"/>
+                </a:solidFill>
+                <a:latin typeface="Arial"/>
+                <a:hlinkClick r:id="rId8"/>
+              </a:rPr>
+              <a:t>Play quiz</a:t>
+            </a:r>
+          </a:p>
+        </p:txBody>
+      </p:sp>
+      <p:sp>
+        <p:nvSpPr>
+          <p:cNvPr id="23" name="Quiz PDF W04-L04"/>
+          <p:cNvSpPr txBox="1"/>
+          <p:nvPr/>
+        </p:nvSpPr>
+        <p:spPr>
+          <a:xfrm>
+            <a:off x="7296912" y="6606540"/>
+            <a:ext cx="1005840" cy="210312"/>
+          </a:xfrm>
+          <a:prstGeom prst="rect">
+            <a:avLst/>
+          </a:prstGeom>
+          <a:noFill/>
+        </p:spPr>
+        <p:txBody>
+          <a:bodyPr wrap="square" lIns="0" rIns="0" tIns="0" bIns="0" anchor="t">
+            <a:normAutofit fontScale="100000" lnSpcReduction="0"/>
+          </a:bodyPr>
+          <a:lstStyle/>
+          <a:p>
+            <a:pPr>
+              <a:spcBef>
+                <a:spcPts val="0"/>
+              </a:spcBef>
+              <a:spcAft>
+                <a:spcPts val="0"/>
+              </a:spcAft>
+              <a:defRPr sz="1000" b="0">
+                <a:solidFill>
+                  <a:srgbClr val="D0002B"/>
+                </a:solidFill>
+                <a:latin typeface="Arial"/>
+              </a:defRPr>
+            </a:pPr>
+            <a:r>
+              <a:rPr sz="1000">
+                <a:solidFill>
+                  <a:srgbClr val="F7F8FC"/>
+                </a:solidFill>
+                <a:latin typeface="Arial"/>
+                <a:hlinkClick r:id="rId9"/>
+              </a:rPr>
+              <a:t>Quiz PDF</a:t>
             </a:r>
           </a:p>
         </p:txBody>
